--- a/AI_Agents_and_Advanced_Fine_Tuning_Bootcamp/Slides/Week_10_architecting_agentic_systems.pptx
+++ b/AI_Agents_and_Advanced_Fine_Tuning_Bootcamp/Slides/Week_10_architecting_agentic_systems.pptx
@@ -3329,7 +3329,7 @@
                 </a:solidFill>
                 <a:latin typeface="Calibri"/>
               </a:rPr>
-              <a:t>Sunday, August 9, 2026</a:t>
+              <a:t>Sunday, December 6, 2026</a:t>
             </a:r>
           </a:p>
         </p:txBody>
